--- a/APLOS/POPResources/Templates/QRIDCardEnglish.pptx
+++ b/APLOS/POPResources/Templates/QRIDCardEnglish.pptx
@@ -5302,13 +5302,15 @@
                 <a:latin typeface="Arial" panose="020B0604020202020204" pitchFamily="34" charset="0"/>
                 <a:ea typeface="Arial" panose="020B0604020202020204" pitchFamily="34" charset="0"/>
               </a:rPr>
-              <a:t>{</a:t>
-            </a:r>
-            <a:r>
-              <a:rPr lang="en-US" sz="600" b="1" dirty="0">
+              <a:t>Pratibha </a:t>
+            </a:r>
+            <a:r>
+              <a:rPr lang="en-US" sz="600" b="1" dirty="0" err="1">
+                <a:effectLst/>
                 <a:latin typeface="Arial" panose="020B0604020202020204" pitchFamily="34" charset="0"/>
+                <a:ea typeface="Arial" panose="020B0604020202020204" pitchFamily="34" charset="0"/>
               </a:rPr>
-              <a:t>CompanyName</a:t>
+              <a:t>Syntex</a:t>
             </a:r>
             <a:r>
               <a:rPr lang="en-US" sz="600" b="1" dirty="0">
@@ -5316,7 +5318,7 @@
                 <a:latin typeface="Arial" panose="020B0604020202020204" pitchFamily="34" charset="0"/>
                 <a:ea typeface="Arial" panose="020B0604020202020204" pitchFamily="34" charset="0"/>
               </a:rPr>
-              <a:t>}</a:t>
+              <a:t> Limited</a:t>
             </a:r>
           </a:p>
           <a:p>
@@ -6899,15 +6901,32 @@
                 <a:latin typeface="Arial" panose="020B0604020202020204" pitchFamily="34" charset="0"/>
                 <a:ea typeface="Arial" panose="020B0604020202020204" pitchFamily="34" charset="0"/>
               </a:rPr>
-              <a:t>{</a:t>
-            </a:r>
+              <a:t>Plot No. </a:t>
+            </a:r>
+            <a:r>
+              <a:rPr lang="en-US" sz="600" dirty="0">
+                <a:latin typeface="Arial" panose="020B0604020202020204" pitchFamily="34" charset="0"/>
+                <a:ea typeface="Arial" panose="020B0604020202020204" pitchFamily="34" charset="0"/>
+              </a:rPr>
+              <a:t>4, Industrial Growth Centre, Kheda,</a:t>
+            </a:r>
+          </a:p>
+          <a:p>
+            <a:pPr marL="0" marR="0">
+              <a:spcBef>
+                <a:spcPts val="50"/>
+              </a:spcBef>
+              <a:spcAft>
+                <a:spcPts val="0"/>
+              </a:spcAft>
+            </a:pPr>
             <a:r>
               <a:rPr lang="en-US" sz="600" dirty="0" err="1">
                 <a:effectLst/>
                 <a:latin typeface="Arial" panose="020B0604020202020204" pitchFamily="34" charset="0"/>
                 <a:ea typeface="Arial" panose="020B0604020202020204" pitchFamily="34" charset="0"/>
               </a:rPr>
-              <a:t>CompanyAddress</a:t>
+              <a:t>Pithampur,Dhar,Madhya</a:t>
             </a:r>
             <a:r>
               <a:rPr lang="en-US" sz="600" dirty="0">
@@ -6915,8 +6934,30 @@
                 <a:latin typeface="Arial" panose="020B0604020202020204" pitchFamily="34" charset="0"/>
                 <a:ea typeface="Arial" panose="020B0604020202020204" pitchFamily="34" charset="0"/>
               </a:rPr>
-              <a:t>}</a:t>
-            </a:r>
+              <a:t> Pradesh 454774</a:t>
+            </a:r>
+          </a:p>
+          <a:p>
+            <a:pPr marL="0" marR="0">
+              <a:spcBef>
+                <a:spcPts val="50"/>
+              </a:spcBef>
+              <a:spcAft>
+                <a:spcPts val="0"/>
+              </a:spcAft>
+            </a:pPr>
+            <a:r>
+              <a:rPr lang="en-US" sz="600">
+                <a:latin typeface="Arial" panose="020B0604020202020204" pitchFamily="34" charset="0"/>
+                <a:ea typeface="Arial" panose="020B0604020202020204" pitchFamily="34" charset="0"/>
+              </a:rPr>
+              <a:t>(O) 07292404362-3</a:t>
+            </a:r>
+            <a:endParaRPr lang="en-US" sz="600" dirty="0">
+              <a:effectLst/>
+              <a:latin typeface="Arial" panose="020B0604020202020204" pitchFamily="34" charset="0"/>
+              <a:ea typeface="Arial" panose="020B0604020202020204" pitchFamily="34" charset="0"/>
+            </a:endParaRPr>
           </a:p>
         </p:txBody>
       </p:sp>

--- a/APLOS/POPResources/Templates/QRIDCardEnglish.pptx
+++ b/APLOS/POPResources/Templates/QRIDCardEnglish.pptx
@@ -3811,10 +3811,10 @@
       </p:sp>
       <p:sp>
         <p:nvSpPr>
-          <p:cNvPr id="43" name="Name">
+          <p:cNvPr id="45" name="ID">
             <a:extLst>
               <a:ext uri="{FF2B5EF4-FFF2-40B4-BE49-F238E27FC236}">
-                <a16:creationId xmlns:a16="http://schemas.microsoft.com/office/drawing/2014/main" id="{B6B12232-9F2B-4294-8217-45E7AF310A7C}"/>
+                <a16:creationId xmlns:a16="http://schemas.microsoft.com/office/drawing/2014/main" id="{40E9CA2C-1D4D-46B3-A4E6-3105B60FC880}"/>
               </a:ext>
             </a:extLst>
           </p:cNvPr>
@@ -3823,8 +3823,8 @@
         </p:nvSpPr>
         <p:spPr>
           <a:xfrm>
-            <a:off x="782296" y="1541461"/>
-            <a:ext cx="1145442" cy="59499"/>
+            <a:off x="782296" y="1755236"/>
+            <a:ext cx="1165567" cy="45719"/>
           </a:xfrm>
           <a:prstGeom prst="rect">
             <a:avLst/>
@@ -3950,17 +3950,17 @@
                 <a:latin typeface="Arial Narrow" panose="020B0606020202030204" pitchFamily="34" charset="0"/>
                 <a:cs typeface="Arial" panose="020B0604020202020204" pitchFamily="34" charset="0"/>
               </a:rPr>
-              <a:t>{Name}</a:t>
-            </a:r>
-          </a:p>
-        </p:txBody>
-      </p:sp>
-      <p:sp>
-        <p:nvSpPr>
-          <p:cNvPr id="45" name="ID">
+              <a:t>{ID}</a:t>
+            </a:r>
+          </a:p>
+        </p:txBody>
+      </p:sp>
+      <p:sp>
+        <p:nvSpPr>
+          <p:cNvPr id="47" name="DESIG">
             <a:extLst>
               <a:ext uri="{FF2B5EF4-FFF2-40B4-BE49-F238E27FC236}">
-                <a16:creationId xmlns:a16="http://schemas.microsoft.com/office/drawing/2014/main" id="{40E9CA2C-1D4D-46B3-A4E6-3105B60FC880}"/>
+                <a16:creationId xmlns:a16="http://schemas.microsoft.com/office/drawing/2014/main" id="{49A8A3DB-5B19-4C54-9E75-C4D63916FB17}"/>
               </a:ext>
             </a:extLst>
           </p:cNvPr>
@@ -3969,8 +3969,8 @@
         </p:nvSpPr>
         <p:spPr>
           <a:xfrm>
-            <a:off x="782296" y="1717977"/>
-            <a:ext cx="1165567" cy="45719"/>
+            <a:off x="786265" y="1932145"/>
+            <a:ext cx="1143460" cy="106048"/>
           </a:xfrm>
           <a:prstGeom prst="rect">
             <a:avLst/>
@@ -4096,17 +4096,17 @@
                 <a:latin typeface="Arial Narrow" panose="020B0606020202030204" pitchFamily="34" charset="0"/>
                 <a:cs typeface="Arial" panose="020B0604020202020204" pitchFamily="34" charset="0"/>
               </a:rPr>
-              <a:t>{ID}</a:t>
-            </a:r>
-          </a:p>
-        </p:txBody>
-      </p:sp>
-      <p:sp>
-        <p:nvSpPr>
-          <p:cNvPr id="47" name="DESIG">
+              <a:t>{Department}</a:t>
+            </a:r>
+          </a:p>
+        </p:txBody>
+      </p:sp>
+      <p:sp>
+        <p:nvSpPr>
+          <p:cNvPr id="53" name="DOJ">
             <a:extLst>
               <a:ext uri="{FF2B5EF4-FFF2-40B4-BE49-F238E27FC236}">
-                <a16:creationId xmlns:a16="http://schemas.microsoft.com/office/drawing/2014/main" id="{49A8A3DB-5B19-4C54-9E75-C4D63916FB17}"/>
+                <a16:creationId xmlns:a16="http://schemas.microsoft.com/office/drawing/2014/main" id="{5AD335E8-37F9-4F56-9A6F-0284430FCE43}"/>
               </a:ext>
             </a:extLst>
           </p:cNvPr>
@@ -4115,8 +4115,8 @@
         </p:nvSpPr>
         <p:spPr>
           <a:xfrm>
-            <a:off x="782870" y="1856183"/>
-            <a:ext cx="1143460" cy="106048"/>
+            <a:off x="773758" y="2157094"/>
+            <a:ext cx="1150025" cy="87995"/>
           </a:xfrm>
           <a:prstGeom prst="rect">
             <a:avLst/>
@@ -4242,17 +4242,17 @@
                 <a:latin typeface="Arial Narrow" panose="020B0606020202030204" pitchFamily="34" charset="0"/>
                 <a:cs typeface="Arial" panose="020B0604020202020204" pitchFamily="34" charset="0"/>
               </a:rPr>
-              <a:t>{Department}</a:t>
-            </a:r>
-          </a:p>
-        </p:txBody>
-      </p:sp>
-      <p:sp>
-        <p:nvSpPr>
-          <p:cNvPr id="53" name="DOJ">
+              <a:t>{DOJ}</a:t>
+            </a:r>
+          </a:p>
+        </p:txBody>
+      </p:sp>
+      <p:sp>
+        <p:nvSpPr>
+          <p:cNvPr id="18" name="Name">
             <a:extLst>
               <a:ext uri="{FF2B5EF4-FFF2-40B4-BE49-F238E27FC236}">
-                <a16:creationId xmlns:a16="http://schemas.microsoft.com/office/drawing/2014/main" id="{5AD335E8-37F9-4F56-9A6F-0284430FCE43}"/>
+                <a16:creationId xmlns:a16="http://schemas.microsoft.com/office/drawing/2014/main" id="{8FDDDFFA-6165-4CDD-83B8-28EEA703CB05}"/>
               </a:ext>
             </a:extLst>
           </p:cNvPr>
@@ -4261,8 +4261,8 @@
         </p:nvSpPr>
         <p:spPr>
           <a:xfrm>
-            <a:off x="782296" y="2074862"/>
-            <a:ext cx="1150025" cy="87995"/>
+            <a:off x="66889" y="1495102"/>
+            <a:ext cx="622252" cy="108469"/>
           </a:xfrm>
           <a:prstGeom prst="rect">
             <a:avLst/>
@@ -4388,17 +4388,17 @@
                 <a:latin typeface="Arial Narrow" panose="020B0606020202030204" pitchFamily="34" charset="0"/>
                 <a:cs typeface="Arial" panose="020B0604020202020204" pitchFamily="34" charset="0"/>
               </a:rPr>
-              <a:t>{DOJ}</a:t>
-            </a:r>
-          </a:p>
-        </p:txBody>
-      </p:sp>
-      <p:sp>
-        <p:nvSpPr>
-          <p:cNvPr id="18" name="Name">
+              <a:t>Name</a:t>
+            </a:r>
+          </a:p>
+        </p:txBody>
+      </p:sp>
+      <p:sp>
+        <p:nvSpPr>
+          <p:cNvPr id="19" name="Name">
             <a:extLst>
               <a:ext uri="{FF2B5EF4-FFF2-40B4-BE49-F238E27FC236}">
-                <a16:creationId xmlns:a16="http://schemas.microsoft.com/office/drawing/2014/main" id="{8FDDDFFA-6165-4CDD-83B8-28EEA703CB05}"/>
+                <a16:creationId xmlns:a16="http://schemas.microsoft.com/office/drawing/2014/main" id="{2AEDAEC6-3522-44D0-BB03-34BD0B74B1E6}"/>
               </a:ext>
             </a:extLst>
           </p:cNvPr>
@@ -4407,8 +4407,8 @@
         </p:nvSpPr>
         <p:spPr>
           <a:xfrm>
-            <a:off x="20125" y="1502520"/>
-            <a:ext cx="622252" cy="108469"/>
+            <a:off x="66889" y="1725333"/>
+            <a:ext cx="715981" cy="82702"/>
           </a:xfrm>
           <a:prstGeom prst="rect">
             <a:avLst/>
@@ -4534,17 +4534,17 @@
                 <a:latin typeface="Arial Narrow" panose="020B0606020202030204" pitchFamily="34" charset="0"/>
                 <a:cs typeface="Arial" panose="020B0604020202020204" pitchFamily="34" charset="0"/>
               </a:rPr>
-              <a:t>  Name</a:t>
-            </a:r>
-          </a:p>
-        </p:txBody>
-      </p:sp>
-      <p:sp>
-        <p:nvSpPr>
-          <p:cNvPr id="19" name="Name">
+              <a:t>Emp Code</a:t>
+            </a:r>
+          </a:p>
+        </p:txBody>
+      </p:sp>
+      <p:sp>
+        <p:nvSpPr>
+          <p:cNvPr id="20" name="Name">
             <a:extLst>
               <a:ext uri="{FF2B5EF4-FFF2-40B4-BE49-F238E27FC236}">
-                <a16:creationId xmlns:a16="http://schemas.microsoft.com/office/drawing/2014/main" id="{2AEDAEC6-3522-44D0-BB03-34BD0B74B1E6}"/>
+                <a16:creationId xmlns:a16="http://schemas.microsoft.com/office/drawing/2014/main" id="{0C0B7A86-4930-4EE0-A06C-07E2D564B7E4}"/>
               </a:ext>
             </a:extLst>
           </p:cNvPr>
@@ -4553,8 +4553,8 @@
         </p:nvSpPr>
         <p:spPr>
           <a:xfrm>
-            <a:off x="75118" y="1680623"/>
-            <a:ext cx="622252" cy="108469"/>
+            <a:off x="19551" y="1925644"/>
+            <a:ext cx="762745" cy="130269"/>
           </a:xfrm>
           <a:prstGeom prst="rect">
             <a:avLst/>
@@ -4680,17 +4680,17 @@
                 <a:latin typeface="Arial Narrow" panose="020B0606020202030204" pitchFamily="34" charset="0"/>
                 <a:cs typeface="Arial" panose="020B0604020202020204" pitchFamily="34" charset="0"/>
               </a:rPr>
-              <a:t>Emp Code</a:t>
-            </a:r>
-          </a:p>
-        </p:txBody>
-      </p:sp>
-      <p:sp>
-        <p:nvSpPr>
-          <p:cNvPr id="20" name="Name">
+              <a:t>  Department</a:t>
+            </a:r>
+          </a:p>
+        </p:txBody>
+      </p:sp>
+      <p:sp>
+        <p:nvSpPr>
+          <p:cNvPr id="21" name="Name">
             <a:extLst>
               <a:ext uri="{FF2B5EF4-FFF2-40B4-BE49-F238E27FC236}">
-                <a16:creationId xmlns:a16="http://schemas.microsoft.com/office/drawing/2014/main" id="{0C0B7A86-4930-4EE0-A06C-07E2D564B7E4}"/>
+                <a16:creationId xmlns:a16="http://schemas.microsoft.com/office/drawing/2014/main" id="{E568E397-8FA2-488B-96C0-2E4F5759BAC5}"/>
               </a:ext>
             </a:extLst>
           </p:cNvPr>
@@ -4699,8 +4699,8 @@
         </p:nvSpPr>
         <p:spPr>
           <a:xfrm>
-            <a:off x="20125" y="1856182"/>
-            <a:ext cx="762745" cy="130269"/>
+            <a:off x="66889" y="2157373"/>
+            <a:ext cx="715981" cy="66823"/>
           </a:xfrm>
           <a:prstGeom prst="rect">
             <a:avLst/>
@@ -4826,153 +4826,7 @@
                 <a:latin typeface="Arial Narrow" panose="020B0606020202030204" pitchFamily="34" charset="0"/>
                 <a:cs typeface="Arial" panose="020B0604020202020204" pitchFamily="34" charset="0"/>
               </a:rPr>
-              <a:t>  Department</a:t>
-            </a:r>
-          </a:p>
-        </p:txBody>
-      </p:sp>
-      <p:sp>
-        <p:nvSpPr>
-          <p:cNvPr id="21" name="Name">
-            <a:extLst>
-              <a:ext uri="{FF2B5EF4-FFF2-40B4-BE49-F238E27FC236}">
-                <a16:creationId xmlns:a16="http://schemas.microsoft.com/office/drawing/2014/main" id="{E568E397-8FA2-488B-96C0-2E4F5759BAC5}"/>
-              </a:ext>
-            </a:extLst>
-          </p:cNvPr>
-          <p:cNvSpPr txBox="1"/>
-          <p:nvPr/>
-        </p:nvSpPr>
-        <p:spPr>
-          <a:xfrm>
-            <a:off x="20125" y="2074862"/>
-            <a:ext cx="762745" cy="58645"/>
-          </a:xfrm>
-          <a:prstGeom prst="rect">
-            <a:avLst/>
-          </a:prstGeom>
-          <a:solidFill>
-            <a:schemeClr val="bg1"/>
-          </a:solidFill>
-          <a:ln w="9525" cmpd="sng">
-            <a:noFill/>
-          </a:ln>
-        </p:spPr>
-        <p:style>
-          <a:lnRef idx="0">
-            <a:scrgbClr r="0" g="0" b="0"/>
-          </a:lnRef>
-          <a:fillRef idx="0">
-            <a:scrgbClr r="0" g="0" b="0"/>
-          </a:fillRef>
-          <a:effectRef idx="0">
-            <a:scrgbClr r="0" g="0" b="0"/>
-          </a:effectRef>
-          <a:fontRef idx="minor">
-            <a:schemeClr val="dk1"/>
-          </a:fontRef>
-        </p:style>
-        <p:txBody>
-          <a:bodyPr wrap="square" lIns="0" tIns="0" rIns="0" bIns="0" rtlCol="0" anchor="ctr"/>
-          <a:lstStyle>
-            <a:lvl1pPr marL="0" indent="0">
-              <a:defRPr sz="1100">
-                <a:solidFill>
-                  <a:schemeClr val="dk1"/>
-                </a:solidFill>
-                <a:latin typeface="+mn-lt"/>
-                <a:ea typeface="+mn-ea"/>
-                <a:cs typeface="+mn-cs"/>
-              </a:defRPr>
-            </a:lvl1pPr>
-            <a:lvl2pPr marL="457200" indent="0">
-              <a:defRPr sz="1100">
-                <a:solidFill>
-                  <a:schemeClr val="dk1"/>
-                </a:solidFill>
-                <a:latin typeface="+mn-lt"/>
-                <a:ea typeface="+mn-ea"/>
-                <a:cs typeface="+mn-cs"/>
-              </a:defRPr>
-            </a:lvl2pPr>
-            <a:lvl3pPr marL="914400" indent="0">
-              <a:defRPr sz="1100">
-                <a:solidFill>
-                  <a:schemeClr val="dk1"/>
-                </a:solidFill>
-                <a:latin typeface="+mn-lt"/>
-                <a:ea typeface="+mn-ea"/>
-                <a:cs typeface="+mn-cs"/>
-              </a:defRPr>
-            </a:lvl3pPr>
-            <a:lvl4pPr marL="1371600" indent="0">
-              <a:defRPr sz="1100">
-                <a:solidFill>
-                  <a:schemeClr val="dk1"/>
-                </a:solidFill>
-                <a:latin typeface="+mn-lt"/>
-                <a:ea typeface="+mn-ea"/>
-                <a:cs typeface="+mn-cs"/>
-              </a:defRPr>
-            </a:lvl4pPr>
-            <a:lvl5pPr marL="1828800" indent="0">
-              <a:defRPr sz="1100">
-                <a:solidFill>
-                  <a:schemeClr val="dk1"/>
-                </a:solidFill>
-                <a:latin typeface="+mn-lt"/>
-                <a:ea typeface="+mn-ea"/>
-                <a:cs typeface="+mn-cs"/>
-              </a:defRPr>
-            </a:lvl5pPr>
-            <a:lvl6pPr marL="2286000" indent="0">
-              <a:defRPr sz="1100">
-                <a:solidFill>
-                  <a:schemeClr val="dk1"/>
-                </a:solidFill>
-                <a:latin typeface="+mn-lt"/>
-                <a:ea typeface="+mn-ea"/>
-                <a:cs typeface="+mn-cs"/>
-              </a:defRPr>
-            </a:lvl6pPr>
-            <a:lvl7pPr marL="2743200" indent="0">
-              <a:defRPr sz="1100">
-                <a:solidFill>
-                  <a:schemeClr val="dk1"/>
-                </a:solidFill>
-                <a:latin typeface="+mn-lt"/>
-                <a:ea typeface="+mn-ea"/>
-                <a:cs typeface="+mn-cs"/>
-              </a:defRPr>
-            </a:lvl7pPr>
-            <a:lvl8pPr marL="3200400" indent="0">
-              <a:defRPr sz="1100">
-                <a:solidFill>
-                  <a:schemeClr val="dk1"/>
-                </a:solidFill>
-                <a:latin typeface="+mn-lt"/>
-                <a:ea typeface="+mn-ea"/>
-                <a:cs typeface="+mn-cs"/>
-              </a:defRPr>
-            </a:lvl8pPr>
-            <a:lvl9pPr marL="3657600" indent="0">
-              <a:defRPr sz="1100">
-                <a:solidFill>
-                  <a:schemeClr val="dk1"/>
-                </a:solidFill>
-                <a:latin typeface="+mn-lt"/>
-                <a:ea typeface="+mn-ea"/>
-                <a:cs typeface="+mn-cs"/>
-              </a:defRPr>
-            </a:lvl9pPr>
-          </a:lstStyle>
-          <a:p>
-            <a:r>
-              <a:rPr lang="en-US" sz="800" b="1" dirty="0">
-                <a:latin typeface="Arial Narrow" panose="020B0606020202030204" pitchFamily="34" charset="0"/>
-                <a:cs typeface="Arial" panose="020B0604020202020204" pitchFamily="34" charset="0"/>
-              </a:rPr>
-              <a:t>  DOJ</a:t>
+              <a:t>DOJ</a:t>
             </a:r>
           </a:p>
         </p:txBody>
@@ -5225,6 +5079,153 @@
           </a:prstGeom>
         </p:spPr>
       </p:pic>
+      <p:sp>
+        <p:nvSpPr>
+          <p:cNvPr id="24" name="Name">
+            <a:extLst>
+              <a:ext uri="{FF2B5EF4-FFF2-40B4-BE49-F238E27FC236}">
+                <a16:creationId xmlns:a16="http://schemas.microsoft.com/office/drawing/2014/main" id="{63C96C80-4657-454B-90E3-6EDDA4B227AF}"/>
+              </a:ext>
+            </a:extLst>
+          </p:cNvPr>
+          <p:cNvSpPr txBox="1">
+            <a:spLocks noChangeArrowheads="1"/>
+          </p:cNvSpPr>
+          <p:nvPr/>
+        </p:nvSpPr>
+        <p:spPr bwMode="white">
+          <a:xfrm>
+            <a:off x="780117" y="1493892"/>
+            <a:ext cx="1144599" cy="210548"/>
+          </a:xfrm>
+          <a:prstGeom prst="rect">
+            <a:avLst/>
+          </a:prstGeom>
+          <a:solidFill>
+            <a:schemeClr val="bg1"/>
+          </a:solidFill>
+          <a:ln w="9525">
+            <a:noFill/>
+            <a:headEnd type="none"/>
+            <a:tailEnd type="none"/>
+          </a:ln>
+        </p:spPr>
+        <p:style>
+          <a:lnRef idx="0">
+            <a:scrgbClr r="0" g="0" b="0"/>
+          </a:lnRef>
+          <a:fillRef idx="0">
+            <a:scrgbClr r="0" g="0" b="0"/>
+          </a:fillRef>
+          <a:effectRef idx="0">
+            <a:scrgbClr r="0" g="0" b="0"/>
+          </a:effectRef>
+          <a:fontRef idx="minor">
+            <a:schemeClr val="dk1"/>
+          </a:fontRef>
+        </p:style>
+        <p:txBody>
+          <a:bodyPr wrap="square" lIns="0" tIns="0" rIns="0" bIns="0" anchor="ctr">
+            <a:normAutofit/>
+          </a:bodyPr>
+          <a:lstStyle>
+            <a:lvl1pPr marL="0" indent="0" defTabSz="173043">
+              <a:defRPr sz="1100" dirty="0">
+                <a:solidFill>
+                  <a:schemeClr val="tx1"/>
+                </a:solidFill>
+                <a:latin typeface="+mn-lt"/>
+                <a:ea typeface="+mn-ea"/>
+              </a:defRPr>
+            </a:lvl1pPr>
+            <a:lvl2pPr marL="457200" indent="0" defTabSz="173043">
+              <a:defRPr sz="1100" dirty="0">
+                <a:solidFill>
+                  <a:schemeClr val="tx1"/>
+                </a:solidFill>
+                <a:latin typeface="+mn-lt"/>
+                <a:ea typeface="+mn-ea"/>
+              </a:defRPr>
+            </a:lvl2pPr>
+            <a:lvl3pPr marL="914400" indent="0" defTabSz="173043">
+              <a:defRPr sz="1100" dirty="0">
+                <a:solidFill>
+                  <a:schemeClr val="tx1"/>
+                </a:solidFill>
+                <a:latin typeface="+mn-lt"/>
+                <a:ea typeface="+mn-ea"/>
+              </a:defRPr>
+            </a:lvl3pPr>
+            <a:lvl4pPr marL="1371600" indent="0" defTabSz="173043">
+              <a:defRPr sz="1100" dirty="0">
+                <a:solidFill>
+                  <a:schemeClr val="tx1"/>
+                </a:solidFill>
+                <a:latin typeface="+mn-lt"/>
+                <a:ea typeface="+mn-ea"/>
+              </a:defRPr>
+            </a:lvl4pPr>
+            <a:lvl5pPr marL="1828800" indent="0" defTabSz="173043">
+              <a:defRPr sz="1100" dirty="0">
+                <a:solidFill>
+                  <a:schemeClr val="tx1"/>
+                </a:solidFill>
+                <a:latin typeface="+mn-lt"/>
+                <a:ea typeface="+mn-ea"/>
+              </a:defRPr>
+            </a:lvl5pPr>
+            <a:lvl6pPr marL="2286000" indent="0" defTabSz="173043">
+              <a:defRPr sz="1100" dirty="0">
+                <a:solidFill>
+                  <a:schemeClr val="tx1"/>
+                </a:solidFill>
+                <a:latin typeface="+mn-lt"/>
+                <a:ea typeface="+mn-ea"/>
+              </a:defRPr>
+            </a:lvl6pPr>
+            <a:lvl7pPr marL="2743200" indent="0" defTabSz="173043">
+              <a:defRPr sz="1100" dirty="0">
+                <a:solidFill>
+                  <a:schemeClr val="tx1"/>
+                </a:solidFill>
+                <a:latin typeface="+mn-lt"/>
+                <a:ea typeface="+mn-ea"/>
+              </a:defRPr>
+            </a:lvl7pPr>
+            <a:lvl8pPr marL="3200400" indent="0" defTabSz="173043">
+              <a:defRPr sz="1100" dirty="0">
+                <a:solidFill>
+                  <a:schemeClr val="tx1"/>
+                </a:solidFill>
+                <a:latin typeface="+mn-lt"/>
+                <a:ea typeface="+mn-ea"/>
+              </a:defRPr>
+            </a:lvl8pPr>
+            <a:lvl9pPr marL="3657600" indent="0" defTabSz="173043">
+              <a:defRPr sz="1100" dirty="0">
+                <a:solidFill>
+                  <a:schemeClr val="tx1"/>
+                </a:solidFill>
+                <a:latin typeface="+mn-lt"/>
+                <a:ea typeface="+mn-ea"/>
+              </a:defRPr>
+            </a:lvl9pPr>
+          </a:lstStyle>
+          <a:p>
+            <a:pPr defTabSz="173043">
+              <a:defRPr sz="800" dirty="0">
+                <a:latin typeface="Kalpurush"/>
+              </a:defRPr>
+            </a:pPr>
+            <a:r>
+              <a:rPr lang="en-US" b="1" dirty="0">
+                <a:latin typeface="Arial Narrow"/>
+              </a:rPr>
+              <a:t>{Name}</a:t>
+            </a:r>
+          </a:p>
+        </p:txBody>
+      </p:sp>
     </p:spTree>
     <p:extLst>
       <p:ext uri="{BB962C8B-B14F-4D97-AF65-F5344CB8AC3E}">
@@ -5498,8 +5499,8 @@
         </p:nvSpPr>
         <p:spPr>
           <a:xfrm>
-            <a:off x="973930" y="1248178"/>
-            <a:ext cx="854131" cy="82641"/>
+            <a:off x="982309" y="1206639"/>
+            <a:ext cx="851254" cy="140087"/>
           </a:xfrm>
           <a:prstGeom prst="rect">
             <a:avLst/>
@@ -5658,7 +5659,7 @@
         </p:nvSpPr>
         <p:spPr>
           <a:xfrm>
-            <a:off x="114300" y="1350373"/>
+            <a:off x="112628" y="1428283"/>
             <a:ext cx="854131" cy="148108"/>
           </a:xfrm>
           <a:prstGeom prst="rect">
@@ -5804,7 +5805,7 @@
         </p:nvSpPr>
         <p:spPr>
           <a:xfrm>
-            <a:off x="965555" y="1341594"/>
+            <a:off x="981104" y="1419660"/>
             <a:ext cx="845078" cy="156887"/>
           </a:xfrm>
           <a:prstGeom prst="rect">
@@ -5964,7 +5965,7 @@
         </p:nvSpPr>
         <p:spPr>
           <a:xfrm>
-            <a:off x="114300" y="1560991"/>
+            <a:off x="108796" y="1674033"/>
             <a:ext cx="845079" cy="106866"/>
           </a:xfrm>
           <a:prstGeom prst="rect">
@@ -6110,7 +6111,7 @@
         </p:nvSpPr>
         <p:spPr>
           <a:xfrm>
-            <a:off x="973931" y="1568015"/>
+            <a:off x="982309" y="1701754"/>
             <a:ext cx="758953" cy="56164"/>
           </a:xfrm>
           <a:prstGeom prst="rect">
@@ -6256,7 +6257,7 @@
         </p:nvSpPr>
         <p:spPr>
           <a:xfrm>
-            <a:off x="114300" y="1737391"/>
+            <a:off x="108796" y="1857098"/>
             <a:ext cx="859631" cy="106866"/>
           </a:xfrm>
           <a:prstGeom prst="rect">
@@ -6402,8 +6403,8 @@
         </p:nvSpPr>
         <p:spPr>
           <a:xfrm>
-            <a:off x="959379" y="1768006"/>
-            <a:ext cx="697146" cy="45719"/>
+            <a:off x="968427" y="1877538"/>
+            <a:ext cx="697146" cy="71648"/>
           </a:xfrm>
           <a:prstGeom prst="rect">
             <a:avLst/>
@@ -6562,7 +6563,7 @@
         </p:nvSpPr>
         <p:spPr>
           <a:xfrm>
-            <a:off x="114299" y="1927309"/>
+            <a:off x="114299" y="2073969"/>
             <a:ext cx="859631" cy="106866"/>
           </a:xfrm>
           <a:prstGeom prst="rect">
@@ -6708,8 +6709,8 @@
         </p:nvSpPr>
         <p:spPr>
           <a:xfrm>
-            <a:off x="980106" y="1949087"/>
-            <a:ext cx="853457" cy="178315"/>
+            <a:off x="976915" y="2040012"/>
+            <a:ext cx="853457" cy="272045"/>
           </a:xfrm>
           <a:prstGeom prst="rect">
             <a:avLst/>
@@ -6851,6 +6852,12 @@
               </a:rPr>
               <a:t>}</a:t>
             </a:r>
+          </a:p>
+          <a:p>
+            <a:endParaRPr lang="en-US" sz="800" b="1" dirty="0">
+              <a:latin typeface="Arial Narrow" panose="020B0606020202030204" pitchFamily="34" charset="0"/>
+              <a:cs typeface="Arial" panose="020B0604020202020204" pitchFamily="34" charset="0"/>
+            </a:endParaRPr>
           </a:p>
         </p:txBody>
       </p:sp>
